--- a/docs/PRAMANA-pitch.pptx
+++ b/docs/PRAMANA-pitch.pptx
@@ -4527,7 +4527,7 @@
                 <a:ea typeface="Calibri" pitchFamily="34" charset="-122"/>
                 <a:cs typeface="Calibri" pitchFamily="34" charset="-120"/>
               </a:rPr>
-              <a:t>[add Vercel URL]</a:t>
+              <a:t>pramana-arya-patils-projects-37178a61.vercel.app</a:t>
             </a:r>
             <a:endParaRPr lang="en-US" sz="1400" dirty="0"/>
           </a:p>
